--- a/artifacts/speaking-portfolio-expanded/decks/evidence-learning-15min-screen.pptx
+++ b/artifacts/speaking-portfolio-expanded/decks/evidence-learning-15min-screen.pptx
@@ -1384,52 +1384,6 @@
                 <a:ea typeface="Arial"/>
                 <a:cs typeface="Arial"/>
               </a:rPr>
-              <a:t xml:space="preserve">Koedinger and Aleven (2007), [Exploring the Assistance Dilemma in Experiments with Cognitive Tutors](https://doi.org/10.1007/s10648-007-9049-0), Educational Psychology Review 19(3), 239 to 264. Cited on slide 3.</a:t>
-            </a:r>
-            <a:endParaRPr lang="en-US" sz="1200"/>
-          </a:p>
-          <a:p>
-            <a:pPr marL="0" indent="0">
-              <a:lnSpc>
-                <a:spcPts val="1560"/>
-              </a:lnSpc>
-              <a:spcAft>
-                <a:spcPts val="0"/>
-              </a:spcAft>
-              <a:buNone/>
-            </a:pPr>
-            <a:r>
-              <a:rPr lang="en-US" sz="1200" b="0">
-                <a:solidFill>
-                  <a:srgbClr val="202b33"/>
-                </a:solidFill>
-                <a:latin typeface="Arial"/>
-                <a:ea typeface="Arial"/>
-                <a:cs typeface="Arial"/>
-              </a:rPr>
-              <a:t xml:space="preserve"/>
-            </a:r>
-            <a:endParaRPr lang="en-US" sz="1200"/>
-          </a:p>
-          <a:p>
-            <a:pPr marL="0" indent="0">
-              <a:lnSpc>
-                <a:spcPts val="1560"/>
-              </a:lnSpc>
-              <a:spcAft>
-                <a:spcPts val="0"/>
-              </a:spcAft>
-              <a:buNone/>
-            </a:pPr>
-            <a:r>
-              <a:rPr lang="en-US" sz="1200" b="0">
-                <a:solidFill>
-                  <a:srgbClr val="202b33"/>
-                </a:solidFill>
-                <a:latin typeface="Arial"/>
-                <a:ea typeface="Arial"/>
-                <a:cs typeface="Arial"/>
-              </a:rPr>
               <a:t xml:space="preserve"/>
             </a:r>
             <a:endParaRPr lang="en-US" sz="1200"/>
@@ -2162,7 +2116,7 @@
                 <a:ea typeface="Arial"/>
                 <a:cs typeface="Arial"/>
               </a:rPr>
-              <a:t xml:space="preserve">Source slide 7. 06:00 to 09:30</a:t>
+              <a:t xml:space="preserve">Source slide 7. 06:00 to 09:00</a:t>
             </a:r>
             <a:endParaRPr lang="en-US" sz="1200"/>
           </a:p>
@@ -2300,7 +2254,7 @@
                 <a:ea typeface="Arial"/>
                 <a:cs typeface="Arial"/>
               </a:rPr>
-              <a:t xml:space="preserve">Run the two scripted learners from the runbook, then go live. Reveal the wrong argument. Let the room find the base. Reveal $120 only after the diagnostic question. Ask for $96 and one sentence explaining it.</a:t>
+              <a:t xml:space="preserve">Run the scripted tutor turns — from the kit or read off the card — then go live. Reveal the wrong argument. Let the room find the base. Reveal $120 only after the diagnostic question. Ask for $96 and one sentence explaining it.</a:t>
             </a:r>
             <a:endParaRPr lang="en-US" sz="1200"/>
           </a:p>
@@ -2438,7 +2392,7 @@
                 <a:ea typeface="Arial"/>
                 <a:cs typeface="Arial"/>
               </a:rPr>
-              <a:t xml:space="preserve">Runbook section 5 for the scripted turns. Two-minute compression: skip the kit, run only the $100 sequence, state the $80 item.</a:t>
+              <a:t xml:space="preserve">Runbook section 5 has the five scripted turns and the same table in print. If the room is quiet, present the prepared learner response; never pressure an individual into a public assessment. Two-minute compression: skip the kit, run only the $100 sequence, state the $80 item.</a:t>
             </a:r>
             <a:endParaRPr lang="en-US" sz="1200"/>
           </a:p>
@@ -2597,7 +2551,7 @@
                 <a:ea typeface="Arial"/>
                 <a:cs typeface="Arial"/>
               </a:rPr>
-              <a:t xml:space="preserve">Source slide 8. 09:30 to 11:30</a:t>
+              <a:t xml:space="preserve">Source slide 8. 09:00 to 11:00</a:t>
             </a:r>
             <a:endParaRPr lang="en-US" sz="1200"/>
           </a:p>
@@ -2781,7 +2735,7 @@
                 <a:ea typeface="Arial"/>
                 <a:cs typeface="Arial"/>
               </a:rPr>
-              <a:t xml:space="preserve">Zero: the wrong base persists. One: the right number, no explanation. Two: the learner explains the current amount. Help goes in its own column so a human can read it, and asking a question costs nothing. Try the rubric on sample work before it touches a grade.</a:t>
+              <a:t xml:space="preserve">Zero: the wrong base persists. One: the right number, no explanation. Two: the learner explains the current amount. Help goes in its own column so a human can read it, and asking a question costs nothing.</a:t>
             </a:r>
             <a:endParaRPr lang="en-US" sz="1200"/>
           </a:p>
@@ -2873,7 +2827,7 @@
                 <a:ea typeface="Arial"/>
                 <a:cs typeface="Arial"/>
               </a:rPr>
-              <a:t xml:space="preserve">Bastani et al. (2025), [Generative AI without guardrails can harm learning](https://doi.org/10.1073/pnas.2422633122), PNAS. A [correction](https://doi.org/10.1073/pnas.2518204122) exists; check it before quoting figures.</a:t>
+              <a:t xml:space="preserve">Bastani et al. (2025), [Generative AI without guardrails can harm learning](https://doi.org/10.1073/pnas.2422633122), PNAS. The [correction](https://doi.org/10.1073/pnas.2518204122) (August 2025) fixes an author affiliation; no result changed.</a:t>
             </a:r>
             <a:endParaRPr lang="en-US" sz="1200"/>
           </a:p>
@@ -3170,7 +3124,7 @@
                 <a:ea typeface="Arial"/>
                 <a:cs typeface="Arial"/>
               </a:rPr>
-              <a:t xml:space="preserve">Source slide 9. 11:30 to 13:30</a:t>
+              <a:t xml:space="preserve">Source slide 9. 11:00 to 13:30</a:t>
             </a:r>
             <a:endParaRPr lang="en-US" sz="1200"/>
           </a:p>
@@ -3354,7 +3308,7 @@
                 <a:ea typeface="Arial"/>
                 <a:cs typeface="Arial"/>
               </a:rPr>
-              <a:t xml:space="preserve">Answering from memory and reading a model's output aloud produce different mistakes. The reader falls behind as the text wraps and jumps. They mispronounce a word they'd never have chosen. Spoken language carries enough tells to sort likely from unlikely, never to convict.</a:t>
+              <a:t xml:space="preserve">Answering from memory and reading a model's output aloud produce different mistakes. The reader falls behind as the text wraps and jumps. They mispronounce a word they'd never have chosen. Spoken language carries enough tells to sort likely from unlikely.</a:t>
             </a:r>
             <a:endParaRPr lang="en-US" sz="1200"/>
           </a:p>
@@ -3446,99 +3400,145 @@
                 <a:ea typeface="Arial"/>
                 <a:cs typeface="Arial"/>
               </a:rPr>
-              <a:t xml:space="preserve"/>
-            </a:r>
-            <a:endParaRPr lang="en-US" sz="1200"/>
-          </a:p>
-          <a:p>
-            <a:pPr marL="0" indent="0">
-              <a:lnSpc>
-                <a:spcPts val="1560"/>
-              </a:lnSpc>
-              <a:spcAft>
-                <a:spcPts val="0"/>
-              </a:spcAft>
-              <a:buNone/>
-            </a:pPr>
-            <a:r>
-              <a:rPr lang="en-US" sz="1200" b="0">
-                <a:solidFill>
-                  <a:srgbClr val="202b33"/>
-                </a:solidFill>
-                <a:latin typeface="Arial"/>
-                <a:ea typeface="Arial"/>
-                <a:cs typeface="Arial"/>
-              </a:rPr>
-              <a:t xml:space="preserve"/>
-            </a:r>
-            <a:endParaRPr lang="en-US" sz="1200"/>
-          </a:p>
-          <a:p>
-            <a:pPr marL="0" indent="0">
-              <a:lnSpc>
-                <a:spcPts val="1560"/>
-              </a:lnSpc>
-              <a:spcAft>
-                <a:spcPts val="0"/>
-              </a:spcAft>
-              <a:buNone/>
-            </a:pPr>
-            <a:r>
-              <a:rPr lang="en-US" sz="1200" b="0">
-                <a:solidFill>
-                  <a:srgbClr val="202b33"/>
-                </a:solidFill>
-                <a:latin typeface="Arial"/>
-                <a:ea typeface="Arial"/>
-                <a:cs typeface="Arial"/>
-              </a:rPr>
-              <a:t xml:space="preserve"/>
-            </a:r>
-            <a:endParaRPr lang="en-US" sz="1200"/>
-          </a:p>
-          <a:p>
-            <a:pPr marL="0" indent="0">
-              <a:lnSpc>
-                <a:spcPts val="1560"/>
-              </a:lnSpc>
-              <a:spcAft>
-                <a:spcPts val="0"/>
-              </a:spcAft>
-              <a:buNone/>
-            </a:pPr>
-            <a:r>
-              <a:rPr lang="en-US" sz="1200" b="0">
-                <a:solidFill>
-                  <a:srgbClr val="202b33"/>
-                </a:solidFill>
-                <a:latin typeface="Arial"/>
-                <a:ea typeface="Arial"/>
-                <a:cs typeface="Arial"/>
-              </a:rPr>
-              <a:t xml:space="preserve"/>
-            </a:r>
-            <a:endParaRPr lang="en-US" sz="1200"/>
-          </a:p>
-          <a:p>
-            <a:pPr marL="0" indent="0">
-              <a:lnSpc>
-                <a:spcPts val="1560"/>
-              </a:lnSpc>
-              <a:spcAft>
-                <a:spcPts val="0"/>
-              </a:spcAft>
-              <a:buNone/>
-            </a:pPr>
-            <a:r>
-              <a:rPr lang="en-US" sz="1200" b="0">
-                <a:solidFill>
-                  <a:srgbClr val="202b33"/>
-                </a:solidFill>
-                <a:latin typeface="Arial"/>
-                <a:ea typeface="Arial"/>
-                <a:cs typeface="Arial"/>
-              </a:rPr>
-              <a:t xml:space="preserve">Bridge: count AI time like talk time, write the objective on the board to the agent, and redesign one checkpoint; the worksheet is a handout.</a:t>
+              <a:t xml:space="preserve">Now the care, and it's real. A student's voice identifies them and can be cloned. Fingerprinting voices is plausible technology; that's a reason for caution, not a feature. Newer offline models claim to detect frustration and distress in speech, and offline is what lets them meet zero-retention, no-sharing district rules on modest hardware. Any student-facing voice tool gets maximum privacy, a written alternative, age-appropriate use only, and a retention rule written before the first recording. A replay is context, never proof.</a:t>
+            </a:r>
+            <a:endParaRPr lang="en-US" sz="1200"/>
+          </a:p>
+          <a:p>
+            <a:pPr marL="0" indent="0">
+              <a:lnSpc>
+                <a:spcPts val="1560"/>
+              </a:lnSpc>
+              <a:spcAft>
+                <a:spcPts val="0"/>
+              </a:spcAft>
+              <a:buNone/>
+            </a:pPr>
+            <a:r>
+              <a:rPr lang="en-US" sz="1200" b="0">
+                <a:solidFill>
+                  <a:srgbClr val="202b33"/>
+                </a:solidFill>
+                <a:latin typeface="Arial"/>
+                <a:ea typeface="Arial"/>
+                <a:cs typeface="Arial"/>
+              </a:rPr>
+              <a:t xml:space="preserve"/>
+            </a:r>
+            <a:endParaRPr lang="en-US" sz="1200"/>
+          </a:p>
+          <a:p>
+            <a:pPr marL="0" indent="0">
+              <a:lnSpc>
+                <a:spcPts val="1560"/>
+              </a:lnSpc>
+              <a:spcAft>
+                <a:spcPts val="0"/>
+              </a:spcAft>
+              <a:buNone/>
+            </a:pPr>
+            <a:r>
+              <a:rPr lang="en-US" sz="1200" b="0">
+                <a:solidFill>
+                  <a:srgbClr val="202b33"/>
+                </a:solidFill>
+                <a:latin typeface="Arial"/>
+                <a:ea typeface="Arial"/>
+                <a:cs typeface="Arial"/>
+              </a:rPr>
+              <a:t xml:space="preserve"/>
+            </a:r>
+            <a:endParaRPr lang="en-US" sz="1200"/>
+          </a:p>
+          <a:p>
+            <a:pPr marL="0" indent="0">
+              <a:lnSpc>
+                <a:spcPts val="1560"/>
+              </a:lnSpc>
+              <a:spcAft>
+                <a:spcPts val="0"/>
+              </a:spcAft>
+              <a:buNone/>
+            </a:pPr>
+            <a:r>
+              <a:rPr lang="en-US" sz="1200" b="0">
+                <a:solidFill>
+                  <a:srgbClr val="202b33"/>
+                </a:solidFill>
+                <a:latin typeface="Arial"/>
+                <a:ea typeface="Arial"/>
+                <a:cs typeface="Arial"/>
+              </a:rPr>
+              <a:t xml:space="preserve"/>
+            </a:r>
+            <a:endParaRPr lang="en-US" sz="1200"/>
+          </a:p>
+          <a:p>
+            <a:pPr marL="0" indent="0">
+              <a:lnSpc>
+                <a:spcPts val="1560"/>
+              </a:lnSpc>
+              <a:spcAft>
+                <a:spcPts val="0"/>
+              </a:spcAft>
+              <a:buNone/>
+            </a:pPr>
+            <a:r>
+              <a:rPr lang="en-US" sz="1200" b="0">
+                <a:solidFill>
+                  <a:srgbClr val="202b33"/>
+                </a:solidFill>
+                <a:latin typeface="Arial"/>
+                <a:ea typeface="Arial"/>
+                <a:cs typeface="Arial"/>
+              </a:rPr>
+              <a:t xml:space="preserve"/>
+            </a:r>
+            <a:endParaRPr lang="en-US" sz="1200"/>
+          </a:p>
+          <a:p>
+            <a:pPr marL="0" indent="0">
+              <a:lnSpc>
+                <a:spcPts val="1560"/>
+              </a:lnSpc>
+              <a:spcAft>
+                <a:spcPts val="0"/>
+              </a:spcAft>
+              <a:buNone/>
+            </a:pPr>
+            <a:r>
+              <a:rPr lang="en-US" sz="1200" b="0">
+                <a:solidFill>
+                  <a:srgbClr val="202b33"/>
+                </a:solidFill>
+                <a:latin typeface="Arial"/>
+                <a:ea typeface="Arial"/>
+                <a:cs typeface="Arial"/>
+              </a:rPr>
+              <a:t xml:space="preserve"/>
+            </a:r>
+            <a:endParaRPr lang="en-US" sz="1200"/>
+          </a:p>
+          <a:p>
+            <a:pPr marL="0" indent="0">
+              <a:lnSpc>
+                <a:spcPts val="1560"/>
+              </a:lnSpc>
+              <a:spcAft>
+                <a:spcPts val="0"/>
+              </a:spcAft>
+              <a:buNone/>
+            </a:pPr>
+            <a:r>
+              <a:rPr lang="en-US" sz="1200" b="0">
+                <a:solidFill>
+                  <a:srgbClr val="202b33"/>
+                </a:solidFill>
+                <a:latin typeface="Arial"/>
+                <a:ea typeface="Arial"/>
+                <a:cs typeface="Arial"/>
+              </a:rPr>
+              <a:t xml:space="preserve">Bridge: count AI time like talk time, write the objective on the board to the agent, and redesign one checkpoint; the worksheet is a handout. And one more student: a friend of mine turned out to be a talented sculptor who never touched the clay in class, because there was no car at home and you do not carry a brick of clay on the bus.</a:t>
             </a:r>
             <a:endParaRPr lang="en-US" sz="1200"/>
           </a:p>
@@ -3790,52 +3790,6 @@
                 <a:cs typeface="Arial"/>
               </a:rPr>
               <a:t xml:space="preserve">Stop trying to prove who typed the sentence. Ask whether the student can explain it, challenge it, change it, apply it, and defend it. That means teaching changes: how we put agents in the room, how we model using them, how we design group work around them.</a:t>
-            </a:r>
-            <a:endParaRPr lang="en-US" sz="1200"/>
-          </a:p>
-          <a:p>
-            <a:pPr marL="0" indent="0">
-              <a:lnSpc>
-                <a:spcPts val="1560"/>
-              </a:lnSpc>
-              <a:spcAft>
-                <a:spcPts val="0"/>
-              </a:spcAft>
-              <a:buNone/>
-            </a:pPr>
-            <a:r>
-              <a:rPr lang="en-US" sz="1200" b="0">
-                <a:solidFill>
-                  <a:srgbClr val="202b33"/>
-                </a:solidFill>
-                <a:latin typeface="Arial"/>
-                <a:ea typeface="Arial"/>
-                <a:cs typeface="Arial"/>
-              </a:rPr>
-              <a:t xml:space="preserve"/>
-            </a:r>
-            <a:endParaRPr lang="en-US" sz="1200"/>
-          </a:p>
-          <a:p>
-            <a:pPr marL="0" indent="0">
-              <a:lnSpc>
-                <a:spcPts val="1560"/>
-              </a:lnSpc>
-              <a:spcAft>
-                <a:spcPts val="0"/>
-              </a:spcAft>
-              <a:buNone/>
-            </a:pPr>
-            <a:r>
-              <a:rPr lang="en-US" sz="1200" b="0">
-                <a:solidFill>
-                  <a:srgbClr val="202b33"/>
-                </a:solidFill>
-                <a:latin typeface="Arial"/>
-                <a:ea typeface="Arial"/>
-                <a:cs typeface="Arial"/>
-              </a:rPr>
-              <a:t xml:space="preserve">The kid next to the Casio owner didn't need a watch. The kid with no car never touched the clay. The same tool that lets Johnny phone it in is the one that can hand a sculptor the clay. Which one happens is a design decision, and it's ours.</a:t>
             </a:r>
             <a:endParaRPr lang="en-US" sz="1200"/>
           </a:p>
@@ -6217,7 +6171,7 @@
                 <a:ea typeface="Arial"/>
                 <a:cs typeface="Arial"/>
               </a:rPr>
-              <a:t xml:space="preserve">Demo: the four-minute reconstruction</a:t>
+              <a:t xml:space="preserve">Demo: four minutes inside a five-minute slide</a:t>
             </a:r>
             <a:endParaRPr lang="en-US" sz="3900"/>
           </a:p>
@@ -6642,30 +6596,7 @@
                 <a:ea typeface="Arial"/>
                 <a:cs typeface="Arial"/>
               </a:rPr>
-              <a:t xml:space="preserve">Score the reasoning, then write down what you</a:t>
-            </a:r>
-            <a:endParaRPr lang="en-US" sz="3900"/>
-          </a:p>
-          <a:p>
-            <a:pPr marL="0" indent="0">
-              <a:lnSpc>
-                <a:spcPts val="4680"/>
-              </a:lnSpc>
-              <a:spcAft>
-                <a:spcPts val="0"/>
-              </a:spcAft>
-              <a:buNone/>
-            </a:pPr>
-            <a:r>
-              <a:rPr lang="en-US" sz="3900" b="1">
-                <a:solidFill>
-                  <a:srgbClr val="F5F1E9"/>
-                </a:solidFill>
-                <a:latin typeface="Arial"/>
-                <a:ea typeface="Arial"/>
-                <a:cs typeface="Arial"/>
-              </a:rPr>
-              <a:t xml:space="preserve">saw</a:t>
+              <a:t xml:space="preserve">Score the reasoning. Write it down</a:t>
             </a:r>
             <a:endParaRPr lang="en-US" sz="3900"/>
           </a:p>

--- a/artifacts/speaking-portfolio-expanded/decks/evidence-learning-15min-screen.pptx
+++ b/artifacts/speaking-portfolio-expanded/decks/evidence-learning-15min-screen.pptx
@@ -146,7 +146,7 @@
                 <a:ea typeface="Arial"/>
                 <a:cs typeface="Arial"/>
               </a:rPr>
-              <a:t xml:space="preserve">Source slide 1. 00:00 to 01:30</a:t>
+              <a:t xml:space="preserve">Source slide 1. 00:00 to 01:00</a:t>
             </a:r>
             <a:endParaRPr lang="en-US" sz="1200"/>
           </a:p>
@@ -331,52 +331,6 @@
                 <a:cs typeface="Arial"/>
               </a:rPr>
               <a:t xml:space="preserve">Confession: I may have used one or two on an assessment. But we're not here for that. What I did was wholesome. These kids are phoning it in. Not even trying. Infuriating, right?</a:t>
-            </a:r>
-            <a:endParaRPr lang="en-US" sz="1200"/>
-          </a:p>
-          <a:p>
-            <a:pPr marL="0" indent="0">
-              <a:lnSpc>
-                <a:spcPts val="1560"/>
-              </a:lnSpc>
-              <a:spcAft>
-                <a:spcPts val="0"/>
-              </a:spcAft>
-              <a:buNone/>
-            </a:pPr>
-            <a:r>
-              <a:rPr lang="en-US" sz="1200" b="0">
-                <a:solidFill>
-                  <a:srgbClr val="202b33"/>
-                </a:solidFill>
-                <a:latin typeface="Arial"/>
-                <a:ea typeface="Arial"/>
-                <a:cs typeface="Arial"/>
-              </a:rPr>
-              <a:t xml:space="preserve"/>
-            </a:r>
-            <a:endParaRPr lang="en-US" sz="1200"/>
-          </a:p>
-          <a:p>
-            <a:pPr marL="0" indent="0">
-              <a:lnSpc>
-                <a:spcPts val="1560"/>
-              </a:lnSpc>
-              <a:spcAft>
-                <a:spcPts val="0"/>
-              </a:spcAft>
-              <a:buNone/>
-            </a:pPr>
-            <a:r>
-              <a:rPr lang="en-US" sz="1200" b="0">
-                <a:solidFill>
-                  <a:srgbClr val="202b33"/>
-                </a:solidFill>
-                <a:latin typeface="Arial"/>
-                <a:ea typeface="Arial"/>
-                <a:cs typeface="Arial"/>
-              </a:rPr>
-              <a:t xml:space="preserve">Our calculator-clutching ancestors had to write a real trajectory into the curriculum. So do we. Everything today is authored fixtures, a rubric I'm proposing, and one exercise that shows evidence being collected. Here's the plan: what we stop doing, what we protect, what we teach, and three ways to actually outsmart them.</a:t>
             </a:r>
             <a:endParaRPr lang="en-US" sz="1200"/>
           </a:p>
@@ -627,7 +581,7 @@
                 <a:ea typeface="Arial"/>
                 <a:cs typeface="Arial"/>
               </a:rPr>
-              <a:t xml:space="preserve">Source slide 2. 01:30 to 03:00</a:t>
+              <a:t xml:space="preserve">Source slide 2. 01:00 to 03:00</a:t>
             </a:r>
             <a:endParaRPr lang="en-US" sz="1200"/>
           </a:p>
@@ -1154,7 +1108,7 @@
                 <a:ea typeface="Arial"/>
                 <a:cs typeface="Arial"/>
               </a:rPr>
-              <a:t xml:space="preserve">Source slide 4. 03:00 to 04:00</a:t>
+              <a:t xml:space="preserve">Source slide 4. 03:00 to 04:15</a:t>
             </a:r>
             <a:endParaRPr lang="en-US" sz="1200"/>
           </a:p>
@@ -1589,7 +1543,7 @@
                 <a:ea typeface="Arial"/>
                 <a:cs typeface="Arial"/>
               </a:rPr>
-              <a:t xml:space="preserve">Source slide 5. 04:00 to 06:00</a:t>
+              <a:t xml:space="preserve">Source slide 5. 04:15 to 06:15</a:t>
             </a:r>
             <a:endParaRPr lang="en-US" sz="1200"/>
           </a:p>
@@ -1820,52 +1774,6 @@
                 <a:cs typeface="Arial"/>
               </a:rPr>
               <a:t xml:space="preserve">That one experience beats every ban, filter and lockdown. Hand the prompt out like a worksheet: "paste these instructions as your first message." Expect a recorded screen or an exported session. Older students get to experiment as the objective itself: the writing challenge, the rhyming challenge, whatever riddles the English teachers love. The constraint that keeps it honest is personalization. Narrate it from summer camp. Reference this week's unit. Meet a criterion the model can't know.</a:t>
-            </a:r>
-            <a:endParaRPr lang="en-US" sz="1200"/>
-          </a:p>
-          <a:p>
-            <a:pPr marL="0" indent="0">
-              <a:lnSpc>
-                <a:spcPts val="1560"/>
-              </a:lnSpc>
-              <a:spcAft>
-                <a:spcPts val="0"/>
-              </a:spcAft>
-              <a:buNone/>
-            </a:pPr>
-            <a:r>
-              <a:rPr lang="en-US" sz="1200" b="0">
-                <a:solidFill>
-                  <a:srgbClr val="202b33"/>
-                </a:solidFill>
-                <a:latin typeface="Arial"/>
-                <a:ea typeface="Arial"/>
-                <a:cs typeface="Arial"/>
-              </a:rPr>
-              <a:t xml:space="preserve"/>
-            </a:r>
-            <a:endParaRPr lang="en-US" sz="1200"/>
-          </a:p>
-          <a:p>
-            <a:pPr marL="0" indent="0">
-              <a:lnSpc>
-                <a:spcPts val="1560"/>
-              </a:lnSpc>
-              <a:spcAft>
-                <a:spcPts val="0"/>
-              </a:spcAft>
-              <a:buNone/>
-            </a:pPr>
-            <a:r>
-              <a:rPr lang="en-US" sz="1200" b="0">
-                <a:solidFill>
-                  <a:srgbClr val="202b33"/>
-                </a:solidFill>
-                <a:latin typeface="Arial"/>
-                <a:ea typeface="Arial"/>
-                <a:cs typeface="Arial"/>
-              </a:rPr>
-              <a:t xml:space="preserve">Privacy rides along for free. If you share Lake Tahoe, maybe not the photo of your grandparents' place on the water that any model can geolocate. Nobody is teaching students how these systems actually work. This assignment does.</a:t>
             </a:r>
             <a:endParaRPr lang="en-US" sz="1200"/>
           </a:p>
@@ -2116,7 +2024,7 @@
                 <a:ea typeface="Arial"/>
                 <a:cs typeface="Arial"/>
               </a:rPr>
-              <a:t xml:space="preserve">Source slide 7. 06:00 to 09:00</a:t>
+              <a:t xml:space="preserve">Source slide 7. 06:15 to 09:15</a:t>
             </a:r>
             <a:endParaRPr lang="en-US" sz="1200"/>
           </a:p>
@@ -2551,7 +2459,7 @@
                 <a:ea typeface="Arial"/>
                 <a:cs typeface="Arial"/>
               </a:rPr>
-              <a:t xml:space="preserve">Source slide 8. 09:00 to 11:00</a:t>
+              <a:t xml:space="preserve">Source slide 8. 09:15 to 10:45</a:t>
             </a:r>
             <a:endParaRPr lang="en-US" sz="1200"/>
           </a:p>
@@ -3124,7 +3032,7 @@
                 <a:ea typeface="Arial"/>
                 <a:cs typeface="Arial"/>
               </a:rPr>
-              <a:t xml:space="preserve">Source slide 9. 11:00 to 13:30</a:t>
+              <a:t xml:space="preserve">Source slide 9. 10:45 to 13:15</a:t>
             </a:r>
             <a:endParaRPr lang="en-US" sz="1200"/>
           </a:p>
@@ -3309,52 +3217,6 @@
                 <a:cs typeface="Arial"/>
               </a:rPr>
               <a:t xml:space="preserve">Answering from memory and reading a model's output aloud produce different mistakes. The reader falls behind as the text wraps and jumps. They mispronounce a word they'd never have chosen. Spoken language carries enough tells to sort likely from unlikely.</a:t>
-            </a:r>
-            <a:endParaRPr lang="en-US" sz="1200"/>
-          </a:p>
-          <a:p>
-            <a:pPr marL="0" indent="0">
-              <a:lnSpc>
-                <a:spcPts val="1560"/>
-              </a:lnSpc>
-              <a:spcAft>
-                <a:spcPts val="0"/>
-              </a:spcAft>
-              <a:buNone/>
-            </a:pPr>
-            <a:r>
-              <a:rPr lang="en-US" sz="1200" b="0">
-                <a:solidFill>
-                  <a:srgbClr val="202b33"/>
-                </a:solidFill>
-                <a:latin typeface="Arial"/>
-                <a:ea typeface="Arial"/>
-                <a:cs typeface="Arial"/>
-              </a:rPr>
-              <a:t xml:space="preserve"/>
-            </a:r>
-            <a:endParaRPr lang="en-US" sz="1200"/>
-          </a:p>
-          <a:p>
-            <a:pPr marL="0" indent="0">
-              <a:lnSpc>
-                <a:spcPts val="1560"/>
-              </a:lnSpc>
-              <a:spcAft>
-                <a:spcPts val="0"/>
-              </a:spcAft>
-              <a:buNone/>
-            </a:pPr>
-            <a:r>
-              <a:rPr lang="en-US" sz="1200" b="0">
-                <a:solidFill>
-                  <a:srgbClr val="202b33"/>
-                </a:solidFill>
-                <a:latin typeface="Arial"/>
-                <a:ea typeface="Arial"/>
-                <a:cs typeface="Arial"/>
-              </a:rPr>
-              <a:t xml:space="preserve">Small groups, speaking, in class: that resets the table. It adds social pressure against cheating and hands you knobs on an incentive structure that today is a magical cheating genie. Not foolproof. A student can build an agent told to seem dumb at first and then learn. Fine. We're changing incentives, not buying certainty.</a:t>
             </a:r>
             <a:endParaRPr lang="en-US" sz="1200"/>
           </a:p>
@@ -3651,7 +3513,7 @@
                 <a:ea typeface="Arial"/>
                 <a:cs typeface="Arial"/>
               </a:rPr>
-              <a:t xml:space="preserve">Source slide 14. 13:30 to 15:00</a:t>
+              <a:t xml:space="preserve">Source slide 14. 13:15 to 15:00</a:t>
             </a:r>
             <a:endParaRPr lang="en-US" sz="1200"/>
           </a:p>
